--- a/slides/pptx/week03.pptx
+++ b/slides/pptx/week03.pptx
@@ -1049,7 +1049,8 @@
           <a:p>
             <a:r>
               <a:rPr lang="en-US" dirty="0"/>
-              <a:t>Synthesis slide — the four separate concepts from the last several slides (KDF, cipher mode, RNG, key source) are one decision each in vulnerable_crypto.py, not one big "use better crypto" fix. Land on the closing line: picking AES-GCM doesn't save you if the key is still hardcoded. ~4 min.</a:t>
+              <a:t>Synthesis slide — the four separate concepts from the last several slides (KDF, cipher mode, RNG, key source) are one decision each in vulnerable_crypto.py, not one big "use better crypto" fix. Land on the closing line: picking AES-GCM doesn't save you if the key is still hardcoded. ~4 min.
+Diagram: Four crypto misuses and their fixes: password storage (md5 to argon2id), cipher mode (hardcoded-key ECB to GCM with a nonce and auth tag), randomness (random.choice to secrets.token_urlsafe), and key source (hardcoded key to an environment variable). One cipher name answers none of these four questions — AES-GCM under a hardcoded key is still CWE-798.</a:t>
             </a:r>
             <a:endParaRPr lang="en-US" dirty="0"/>
           </a:p>
@@ -2105,7 +2106,8 @@
           <a:p>
             <a:r>
               <a:rPr lang="en-US" dirty="0"/>
-              <a:t>Leave this up during Capture the Hash. The static companion to the aes-modes sim: identical plaintext -&gt; identical ciphertext (orange, '='), and GCM -&gt; different blocks (blue, '='-crossed). Point at the two equal orange blocks: 'that equality is the leak.' Land on the footer: AES is a primitive, not a decision — mode, nonce, key source and RNG are four separate choices. ~3 min.</a:t>
+              <a:t>Leave this up during Capture the Hash. The static companion to the aes-modes sim: identical plaintext -&gt; identical ciphertext (orange, '='), and GCM -&gt; different blocks (blue, '='-crossed). Point at the two equal orange blocks: 'that equality is the leak.' Land on the footer: AES is a primitive, not a decision — mode, nonce, key source and RNG are four separate choices. ~3 min.
+Diagram: Two identical 16-byte plaintext blocks encrypted with ECB become two identical ciphertext blocks, so the repetition leaks (the ECB-penguin effect); the same input re-encrypts to the same bytes because there is no nonce. AES-GCM with a random nonce and auth tag produces different, random-looking blocks and detects tampering. Choosing AES is not the fix — AES-ECB leaks and AES-GCM under a hardcoded key is still CWE-798.</a:t>
             </a:r>
             <a:endParaRPr lang="en-US" dirty="0"/>
           </a:p>
@@ -2568,7 +2570,7 @@
       </p:grpSpPr>
       <p:pic>
         <p:nvPicPr>
-          <p:cNvPr id="2" name="Image 0" descr="/Users/pop7/Library/CloudStorage/OneDrive-MonsterConnectCo.,Ltd/Lecture/KOSEN69 - software-security/slides/pptx/assets/logo-small.png">    </p:cNvPr>
+          <p:cNvPr id="2" name="Image 0" descr="/private/tmp/claude-501/-Users-pop7-Library-CloudStorage-OneDrive-MonsterConnectCo--Ltd-Lecture-KOSEN69---software-security/e6d6556f-17de-403d-a9a0-cf2f846149b4/scratchpad/tree/slides/pptx/assets/logo-small.png">    </p:cNvPr>
           <p:cNvPicPr>
             <a:picLocks noChangeAspect="1"/>
           </p:cNvPicPr>
@@ -3010,7 +3012,7 @@
       </p:sp>
       <p:pic>
         <p:nvPicPr>
-          <p:cNvPr id="8" name="Image 1" descr="/Users/pop7/Library/CloudStorage/OneDrive-MonsterConnectCo.,Ltd/Lecture/KOSEN69 - software-security/slides/pptx/assets/logo-small.png">    </p:cNvPr>
+          <p:cNvPr id="8" name="Image 1" descr="/private/tmp/claude-501/-Users-pop7-Library-CloudStorage-OneDrive-MonsterConnectCo--Ltd-Lecture-KOSEN69---software-security/e6d6556f-17de-403d-a9a0-cf2f846149b4/scratchpad/tree/slides/pptx/assets/logo-small.png">    </p:cNvPr>
           <p:cNvPicPr>
             <a:picLocks noChangeAspect="1"/>
           </p:cNvPicPr>
@@ -3332,7 +3334,7 @@
       </p:sp>
       <p:pic>
         <p:nvPicPr>
-          <p:cNvPr id="8" name="Image 1" descr="/Users/pop7/Library/CloudStorage/OneDrive-MonsterConnectCo.,Ltd/Lecture/KOSEN69 - software-security/slides/pptx/assets/logo-small.png">    </p:cNvPr>
+          <p:cNvPr id="8" name="Image 1" descr="/private/tmp/claude-501/-Users-pop7-Library-CloudStorage-OneDrive-MonsterConnectCo--Ltd-Lecture-KOSEN69---software-security/e6d6556f-17de-403d-a9a0-cf2f846149b4/scratchpad/tree/slides/pptx/assets/logo-small.png">    </p:cNvPr>
           <p:cNvPicPr>
             <a:picLocks noChangeAspect="1"/>
           </p:cNvPicPr>
@@ -3654,7 +3656,7 @@
       </p:sp>
       <p:pic>
         <p:nvPicPr>
-          <p:cNvPr id="8" name="Image 1" descr="/Users/pop7/Library/CloudStorage/OneDrive-MonsterConnectCo.,Ltd/Lecture/KOSEN69 - software-security/slides/pptx/assets/logo-small.png">    </p:cNvPr>
+          <p:cNvPr id="8" name="Image 1" descr="/private/tmp/claude-501/-Users-pop7-Library-CloudStorage-OneDrive-MonsterConnectCo--Ltd-Lecture-KOSEN69---software-security/e6d6556f-17de-403d-a9a0-cf2f846149b4/scratchpad/tree/slides/pptx/assets/logo-small.png">    </p:cNvPr>
           <p:cNvPicPr>
             <a:picLocks noChangeAspect="1"/>
           </p:cNvPicPr>
@@ -4070,7 +4072,7 @@
       </p:sp>
       <p:pic>
         <p:nvPicPr>
-          <p:cNvPr id="10" name="Image 1" descr="/Users/pop7/Library/CloudStorage/OneDrive-MonsterConnectCo.,Ltd/Lecture/KOSEN69 - software-security/slides/pptx/assets/logo-small.png">    </p:cNvPr>
+          <p:cNvPr id="10" name="Image 1" descr="/private/tmp/claude-501/-Users-pop7-Library-CloudStorage-OneDrive-MonsterConnectCo--Ltd-Lecture-KOSEN69---software-security/e6d6556f-17de-403d-a9a0-cf2f846149b4/scratchpad/tree/slides/pptx/assets/logo-small.png">    </p:cNvPr>
           <p:cNvPicPr>
             <a:picLocks noChangeAspect="1"/>
           </p:cNvPicPr>
@@ -4329,7 +4331,7 @@
       </p:sp>
       <p:pic>
         <p:nvPicPr>
-          <p:cNvPr id="8" name="Image 1" descr="/Users/pop7/Library/CloudStorage/OneDrive-MonsterConnectCo.,Ltd/Lecture/KOSEN69 - software-security/slides/pptx/assets/logo-small.png">    </p:cNvPr>
+          <p:cNvPr id="8" name="Image 1" descr="/private/tmp/claude-501/-Users-pop7-Library-CloudStorage-OneDrive-MonsterConnectCo--Ltd-Lecture-KOSEN69---software-security/e6d6556f-17de-403d-a9a0-cf2f846149b4/scratchpad/tree/slides/pptx/assets/logo-small.png">    </p:cNvPr>
           <p:cNvPicPr>
             <a:picLocks noChangeAspect="1"/>
           </p:cNvPicPr>
@@ -4473,16 +4475,40 @@
           </a:p>
         </p:txBody>
       </p:sp>
-      <p:sp>
-        <p:nvSpPr>
-          <p:cNvPr id="5" name="Text 2"/>
-          <p:cNvSpPr/>
-          <p:nvPr/>
-        </p:nvSpPr>
-        <p:spPr>
-          <a:xfrm>
-            <a:off x="548640" y="1325880"/>
-            <a:ext cx="8046720" cy="1645920"/>
+      <p:pic>
+        <p:nvPicPr>
+          <p:cNvPr id="5" name="Image 1" descr="Four crypto misuses and their fixes: password storage (md5 to argon2id), cipher mode (hardcoded-key ECB to GCM with a nonce and auth tag), randomness (random.choice to secrets.token_urlsafe), and key source (hardcoded key to an environment variable). One cipher name answers none of these four questions — AES-GCM under a hardcoded key is still CWE-798.">    </p:cNvPr>
+          <p:cNvPicPr>
+            <a:picLocks noChangeAspect="1"/>
+          </p:cNvPicPr>
+          <p:nvPr/>
+        </p:nvPicPr>
+        <p:blipFill>
+          <a:blip r:embed="rId2"/>
+          <a:stretch>
+            <a:fillRect/>
+          </a:stretch>
+        </p:blipFill>
+        <p:spPr>
+          <a:xfrm>
+            <a:off x="2343150" y="1097280"/>
+            <a:ext cx="4457700" cy="3566160"/>
+          </a:xfrm>
+          <a:prstGeom prst="rect">
+            <a:avLst/>
+          </a:prstGeom>
+        </p:spPr>
+      </p:pic>
+      <p:sp>
+        <p:nvSpPr>
+          <p:cNvPr id="6" name="Text 2"/>
+          <p:cNvSpPr/>
+          <p:nvPr/>
+        </p:nvSpPr>
+        <p:spPr>
+          <a:xfrm>
+            <a:off x="457200" y="4800600"/>
+            <a:ext cx="6949440" cy="274320"/>
           </a:xfrm>
           <a:prstGeom prst="rect">
             <a:avLst/>
@@ -4491,62 +4517,21 @@
           <a:ln/>
         </p:spPr>
         <p:txBody>
-          <a:bodyPr wrap="square" lIns="0" tIns="0" rIns="0" bIns="0" rtlCol="0" anchor="t">
-            <a:normAutofit/>
-          </a:bodyPr>
+          <a:bodyPr wrap="square" lIns="0" tIns="0" rIns="0" bIns="0" rtlCol="0" anchor="ctr"/>
           <a:lstStyle/>
           <a:p>
             <a:pPr indent="0" marL="0">
               <a:buNone/>
             </a:pPr>
             <a:r>
-              <a:rPr lang="en-US" sz="1400" dirty="0">
-                <a:solidFill>
-                  <a:srgbClr val="1F2937"/>
+              <a:rPr lang="en-US" sz="900" dirty="0">
+                <a:solidFill>
+                  <a:srgbClr val="64748B"/>
                 </a:solidFill>
                 <a:latin typeface="Calibri" pitchFamily="34" charset="0"/>
                 <a:ea typeface="Calibri" pitchFamily="34" charset="-122"/>
                 <a:cs typeface="Calibri" pitchFamily="34" charset="-120"/>
               </a:rPr>
-              <a:t>See diagram: Four crypto misuses and their fixes: password storage (md5 to argon2id), cipher mode (hardcoded-key ECB to GCM with a nonce and auth tag), randomness (random.choice to secrets.token_urlsafe), and key source (hardcoded key to an environment variable). One cipher name answers none of these four questions — AES-GCM under a hardcoded key is still CWE-798. (web only)</a:t>
-            </a:r>
-            <a:endParaRPr lang="en-US" sz="1400" dirty="0"/>
-          </a:p>
-        </p:txBody>
-      </p:sp>
-      <p:sp>
-        <p:nvSpPr>
-          <p:cNvPr id="6" name="Text 3"/>
-          <p:cNvSpPr/>
-          <p:nvPr/>
-        </p:nvSpPr>
-        <p:spPr>
-          <a:xfrm>
-            <a:off x="457200" y="4800600"/>
-            <a:ext cx="6949440" cy="274320"/>
-          </a:xfrm>
-          <a:prstGeom prst="rect">
-            <a:avLst/>
-          </a:prstGeom>
-          <a:noFill/>
-          <a:ln/>
-        </p:spPr>
-        <p:txBody>
-          <a:bodyPr wrap="square" lIns="0" tIns="0" rIns="0" bIns="0" rtlCol="0" anchor="ctr"/>
-          <a:lstStyle/>
-          <a:p>
-            <a:pPr indent="0" marL="0">
-              <a:buNone/>
-            </a:pPr>
-            <a:r>
-              <a:rPr lang="en-US" sz="900" dirty="0">
-                <a:solidFill>
-                  <a:srgbClr val="64748B"/>
-                </a:solidFill>
-                <a:latin typeface="Calibri" pitchFamily="34" charset="0"/>
-                <a:ea typeface="Calibri" pitchFamily="34" charset="-122"/>
-                <a:cs typeface="Calibri" pitchFamily="34" charset="-120"/>
-              </a:rPr>
               <a:t>Software Security · Week 3</a:t>
             </a:r>
             <a:endParaRPr lang="en-US" sz="900" dirty="0"/>
@@ -4555,14 +4540,14 @@
       </p:sp>
       <p:pic>
         <p:nvPicPr>
-          <p:cNvPr id="7" name="Image 1" descr="/Users/pop7/Library/CloudStorage/OneDrive-MonsterConnectCo.,Ltd/Lecture/KOSEN69 - software-security/slides/pptx/assets/logo-small.png">    </p:cNvPr>
+          <p:cNvPr id="7" name="Image 2" descr="/private/tmp/claude-501/-Users-pop7-Library-CloudStorage-OneDrive-MonsterConnectCo--Ltd-Lecture-KOSEN69---software-security/e6d6556f-17de-403d-a9a0-cf2f846149b4/scratchpad/tree/slides/pptx/assets/logo-small.png">    </p:cNvPr>
           <p:cNvPicPr>
             <a:picLocks noChangeAspect="1"/>
           </p:cNvPicPr>
           <p:nvPr/>
         </p:nvPicPr>
         <p:blipFill>
-          <a:blip r:embed="rId2"/>
+          <a:blip r:embed="rId3"/>
           <a:stretch>
             <a:fillRect/>
           </a:stretch>
@@ -4856,7 +4841,7 @@
       </p:sp>
       <p:pic>
         <p:nvPicPr>
-          <p:cNvPr id="8" name="Image 1" descr="/Users/pop7/Library/CloudStorage/OneDrive-MonsterConnectCo.,Ltd/Lecture/KOSEN69 - software-security/slides/pptx/assets/logo-small.png">    </p:cNvPr>
+          <p:cNvPr id="8" name="Image 1" descr="/private/tmp/claude-501/-Users-pop7-Library-CloudStorage-OneDrive-MonsterConnectCo--Ltd-Lecture-KOSEN69---software-security/e6d6556f-17de-403d-a9a0-cf2f846149b4/scratchpad/tree/slides/pptx/assets/logo-small.png">    </p:cNvPr>
           <p:cNvPicPr>
             <a:picLocks noChangeAspect="1"/>
           </p:cNvPicPr>
@@ -5241,7 +5226,7 @@
       </p:sp>
       <p:pic>
         <p:nvPicPr>
-          <p:cNvPr id="10" name="Image 1" descr="/Users/pop7/Library/CloudStorage/OneDrive-MonsterConnectCo.,Ltd/Lecture/KOSEN69 - software-security/slides/pptx/assets/logo-small.png">    </p:cNvPr>
+          <p:cNvPr id="10" name="Image 1" descr="/private/tmp/claude-501/-Users-pop7-Library-CloudStorage-OneDrive-MonsterConnectCo--Ltd-Lecture-KOSEN69---software-security/e6d6556f-17de-403d-a9a0-cf2f846149b4/scratchpad/tree/slides/pptx/assets/logo-small.png">    </p:cNvPr>
           <p:cNvPicPr>
             <a:picLocks noChangeAspect="1"/>
           </p:cNvPicPr>
@@ -5521,7 +5506,7 @@
       </p:sp>
       <p:pic>
         <p:nvPicPr>
-          <p:cNvPr id="8" name="Image 1" descr="/Users/pop7/Library/CloudStorage/OneDrive-MonsterConnectCo.,Ltd/Lecture/KOSEN69 - software-security/slides/pptx/assets/logo-small.png">    </p:cNvPr>
+          <p:cNvPr id="8" name="Image 1" descr="/private/tmp/claude-501/-Users-pop7-Library-CloudStorage-OneDrive-MonsterConnectCo--Ltd-Lecture-KOSEN69---software-security/e6d6556f-17de-403d-a9a0-cf2f846149b4/scratchpad/tree/slides/pptx/assets/logo-small.png">    </p:cNvPr>
           <p:cNvPicPr>
             <a:picLocks noChangeAspect="1"/>
           </p:cNvPicPr>
@@ -5822,7 +5807,7 @@
       </p:sp>
       <p:pic>
         <p:nvPicPr>
-          <p:cNvPr id="8" name="Image 1" descr="/Users/pop7/Library/CloudStorage/OneDrive-MonsterConnectCo.,Ltd/Lecture/KOSEN69 - software-security/slides/pptx/assets/logo-small.png">    </p:cNvPr>
+          <p:cNvPr id="8" name="Image 1" descr="/private/tmp/claude-501/-Users-pop7-Library-CloudStorage-OneDrive-MonsterConnectCo--Ltd-Lecture-KOSEN69---software-security/e6d6556f-17de-403d-a9a0-cf2f846149b4/scratchpad/tree/slides/pptx/assets/logo-small.png">    </p:cNvPr>
           <p:cNvPicPr>
             <a:picLocks noChangeAspect="1"/>
           </p:cNvPicPr>
@@ -6165,7 +6150,7 @@
       </p:sp>
       <p:pic>
         <p:nvPicPr>
-          <p:cNvPr id="8" name="Image 1" descr="/Users/pop7/Library/CloudStorage/OneDrive-MonsterConnectCo.,Ltd/Lecture/KOSEN69 - software-security/slides/pptx/assets/logo-small.png">    </p:cNvPr>
+          <p:cNvPr id="8" name="Image 1" descr="/private/tmp/claude-501/-Users-pop7-Library-CloudStorage-OneDrive-MonsterConnectCo--Ltd-Lecture-KOSEN69---software-security/e6d6556f-17de-403d-a9a0-cf2f846149b4/scratchpad/tree/slides/pptx/assets/logo-small.png">    </p:cNvPr>
           <p:cNvPicPr>
             <a:picLocks noChangeAspect="1"/>
           </p:cNvPicPr>
@@ -6299,7 +6284,7 @@
       </p:sp>
       <p:pic>
         <p:nvPicPr>
-          <p:cNvPr id="4" name="Image 0" descr="/Users/pop7/Library/CloudStorage/OneDrive-MonsterConnectCo.,Ltd/Lecture/KOSEN69 - software-security/slides/pptx/assets/logo-small.png">    </p:cNvPr>
+          <p:cNvPr id="4" name="Image 0" descr="/private/tmp/claude-501/-Users-pop7-Library-CloudStorage-OneDrive-MonsterConnectCo--Ltd-Lecture-KOSEN69---software-security/e6d6556f-17de-403d-a9a0-cf2f846149b4/scratchpad/tree/slides/pptx/assets/logo-small.png">    </p:cNvPr>
           <p:cNvPicPr>
             <a:picLocks noChangeAspect="1"/>
           </p:cNvPicPr>
@@ -6579,7 +6564,7 @@
       </p:sp>
       <p:pic>
         <p:nvPicPr>
-          <p:cNvPr id="8" name="Image 1" descr="/Users/pop7/Library/CloudStorage/OneDrive-MonsterConnectCo.,Ltd/Lecture/KOSEN69 - software-security/slides/pptx/assets/logo-small.png">    </p:cNvPr>
+          <p:cNvPr id="8" name="Image 1" descr="/private/tmp/claude-501/-Users-pop7-Library-CloudStorage-OneDrive-MonsterConnectCo--Ltd-Lecture-KOSEN69---software-security/e6d6556f-17de-403d-a9a0-cf2f846149b4/scratchpad/tree/slides/pptx/assets/logo-small.png">    </p:cNvPr>
           <p:cNvPicPr>
             <a:picLocks noChangeAspect="1"/>
           </p:cNvPicPr>
@@ -6880,7 +6865,7 @@
       </p:sp>
       <p:pic>
         <p:nvPicPr>
-          <p:cNvPr id="8" name="Image 1" descr="/Users/pop7/Library/CloudStorage/OneDrive-MonsterConnectCo.,Ltd/Lecture/KOSEN69 - software-security/slides/pptx/assets/logo-small.png">    </p:cNvPr>
+          <p:cNvPr id="8" name="Image 1" descr="/private/tmp/claude-501/-Users-pop7-Library-CloudStorage-OneDrive-MonsterConnectCo--Ltd-Lecture-KOSEN69---software-security/e6d6556f-17de-403d-a9a0-cf2f846149b4/scratchpad/tree/slides/pptx/assets/logo-small.png">    </p:cNvPr>
           <p:cNvPicPr>
             <a:picLocks noChangeAspect="1"/>
           </p:cNvPicPr>
@@ -7181,7 +7166,7 @@
       </p:sp>
       <p:pic>
         <p:nvPicPr>
-          <p:cNvPr id="8" name="Image 1" descr="/Users/pop7/Library/CloudStorage/OneDrive-MonsterConnectCo.,Ltd/Lecture/KOSEN69 - software-security/slides/pptx/assets/logo-small.png">    </p:cNvPr>
+          <p:cNvPr id="8" name="Image 1" descr="/private/tmp/claude-501/-Users-pop7-Library-CloudStorage-OneDrive-MonsterConnectCo--Ltd-Lecture-KOSEN69---software-security/e6d6556f-17de-403d-a9a0-cf2f846149b4/scratchpad/tree/slides/pptx/assets/logo-small.png">    </p:cNvPr>
           <p:cNvPicPr>
             <a:picLocks noChangeAspect="1"/>
           </p:cNvPicPr>
@@ -7567,7 +7552,7 @@
       </p:sp>
       <p:pic>
         <p:nvPicPr>
-          <p:cNvPr id="10" name="Image 1" descr="/Users/pop7/Library/CloudStorage/OneDrive-MonsterConnectCo.,Ltd/Lecture/KOSEN69 - software-security/slides/pptx/assets/logo-small.png">    </p:cNvPr>
+          <p:cNvPr id="10" name="Image 1" descr="/private/tmp/claude-501/-Users-pop7-Library-CloudStorage-OneDrive-MonsterConnectCo--Ltd-Lecture-KOSEN69---software-security/e6d6556f-17de-403d-a9a0-cf2f846149b4/scratchpad/tree/slides/pptx/assets/logo-small.png">    </p:cNvPr>
           <p:cNvPicPr>
             <a:picLocks noChangeAspect="1"/>
           </p:cNvPicPr>
@@ -7930,7 +7915,7 @@
       </p:sp>
       <p:pic>
         <p:nvPicPr>
-          <p:cNvPr id="9" name="Image 1" descr="/Users/pop7/Library/CloudStorage/OneDrive-MonsterConnectCo.,Ltd/Lecture/KOSEN69 - software-security/slides/pptx/assets/logo-small.png">    </p:cNvPr>
+          <p:cNvPr id="9" name="Image 1" descr="/private/tmp/claude-501/-Users-pop7-Library-CloudStorage-OneDrive-MonsterConnectCo--Ltd-Lecture-KOSEN69---software-security/e6d6556f-17de-403d-a9a0-cf2f846149b4/scratchpad/tree/slides/pptx/assets/logo-small.png">    </p:cNvPr>
           <p:cNvPicPr>
             <a:picLocks noChangeAspect="1"/>
           </p:cNvPicPr>
@@ -8074,16 +8059,40 @@
           </a:p>
         </p:txBody>
       </p:sp>
-      <p:sp>
-        <p:nvSpPr>
-          <p:cNvPr id="5" name="Text 2"/>
-          <p:cNvSpPr/>
-          <p:nvPr/>
-        </p:nvSpPr>
-        <p:spPr>
-          <a:xfrm>
-            <a:off x="548640" y="1325880"/>
-            <a:ext cx="8046720" cy="1920240"/>
+      <p:pic>
+        <p:nvPicPr>
+          <p:cNvPr id="5" name="Image 1" descr="Two identical 16-byte plaintext blocks encrypted with ECB become two identical ciphertext blocks, so the repetition leaks (the ECB-penguin effect); the same input re-encrypts to the same bytes because there is no nonce. AES-GCM with a random nonce and auth tag produces different, random-looking blocks and detects tampering. Choosing AES is not the fix — AES-ECB leaks and AES-GCM under a hardcoded key is still CWE-798.">    </p:cNvPr>
+          <p:cNvPicPr>
+            <a:picLocks noChangeAspect="1"/>
+          </p:cNvPicPr>
+          <p:nvPr/>
+        </p:nvPicPr>
+        <p:blipFill>
+          <a:blip r:embed="rId2"/>
+          <a:stretch>
+            <a:fillRect/>
+          </a:stretch>
+        </p:blipFill>
+        <p:spPr>
+          <a:xfrm>
+            <a:off x="1783214" y="1097280"/>
+            <a:ext cx="5577572" cy="3566160"/>
+          </a:xfrm>
+          <a:prstGeom prst="rect">
+            <a:avLst/>
+          </a:prstGeom>
+        </p:spPr>
+      </p:pic>
+      <p:sp>
+        <p:nvSpPr>
+          <p:cNvPr id="6" name="Text 2"/>
+          <p:cNvSpPr/>
+          <p:nvPr/>
+        </p:nvSpPr>
+        <p:spPr>
+          <a:xfrm>
+            <a:off x="457200" y="4800600"/>
+            <a:ext cx="6949440" cy="274320"/>
           </a:xfrm>
           <a:prstGeom prst="rect">
             <a:avLst/>
@@ -8092,62 +8101,21 @@
           <a:ln/>
         </p:spPr>
         <p:txBody>
-          <a:bodyPr wrap="square" lIns="0" tIns="0" rIns="0" bIns="0" rtlCol="0" anchor="t">
-            <a:normAutofit/>
-          </a:bodyPr>
+          <a:bodyPr wrap="square" lIns="0" tIns="0" rIns="0" bIns="0" rtlCol="0" anchor="ctr"/>
           <a:lstStyle/>
           <a:p>
             <a:pPr indent="0" marL="0">
               <a:buNone/>
             </a:pPr>
             <a:r>
-              <a:rPr lang="en-US" sz="1400" dirty="0">
-                <a:solidFill>
-                  <a:srgbClr val="1F2937"/>
+              <a:rPr lang="en-US" sz="900" dirty="0">
+                <a:solidFill>
+                  <a:srgbClr val="64748B"/>
                 </a:solidFill>
                 <a:latin typeface="Calibri" pitchFamily="34" charset="0"/>
                 <a:ea typeface="Calibri" pitchFamily="34" charset="-122"/>
                 <a:cs typeface="Calibri" pitchFamily="34" charset="-120"/>
               </a:rPr>
-              <a:t>See diagram: Two identical 16-byte plaintext blocks encrypted with ECB become two identical ciphertext blocks, so the repetition leaks (the ECB-penguin effect); the same input re-encrypts to the same bytes because there is no nonce. AES-GCM with a random nonce and auth tag produces different, random-looking blocks and detects tampering. Choosing AES is not the fix — AES-ECB leaks and AES-GCM under a hardcoded key is still CWE-798. (web only)</a:t>
-            </a:r>
-            <a:endParaRPr lang="en-US" sz="1400" dirty="0"/>
-          </a:p>
-        </p:txBody>
-      </p:sp>
-      <p:sp>
-        <p:nvSpPr>
-          <p:cNvPr id="6" name="Text 3"/>
-          <p:cNvSpPr/>
-          <p:nvPr/>
-        </p:nvSpPr>
-        <p:spPr>
-          <a:xfrm>
-            <a:off x="457200" y="4800600"/>
-            <a:ext cx="6949440" cy="274320"/>
-          </a:xfrm>
-          <a:prstGeom prst="rect">
-            <a:avLst/>
-          </a:prstGeom>
-          <a:noFill/>
-          <a:ln/>
-        </p:spPr>
-        <p:txBody>
-          <a:bodyPr wrap="square" lIns="0" tIns="0" rIns="0" bIns="0" rtlCol="0" anchor="ctr"/>
-          <a:lstStyle/>
-          <a:p>
-            <a:pPr indent="0" marL="0">
-              <a:buNone/>
-            </a:pPr>
-            <a:r>
-              <a:rPr lang="en-US" sz="900" dirty="0">
-                <a:solidFill>
-                  <a:srgbClr val="64748B"/>
-                </a:solidFill>
-                <a:latin typeface="Calibri" pitchFamily="34" charset="0"/>
-                <a:ea typeface="Calibri" pitchFamily="34" charset="-122"/>
-                <a:cs typeface="Calibri" pitchFamily="34" charset="-120"/>
-              </a:rPr>
               <a:t>Software Security · Week 3</a:t>
             </a:r>
             <a:endParaRPr lang="en-US" sz="900" dirty="0"/>
@@ -8156,14 +8124,14 @@
       </p:sp>
       <p:pic>
         <p:nvPicPr>
-          <p:cNvPr id="7" name="Image 1" descr="/Users/pop7/Library/CloudStorage/OneDrive-MonsterConnectCo.,Ltd/Lecture/KOSEN69 - software-security/slides/pptx/assets/logo-small.png">    </p:cNvPr>
+          <p:cNvPr id="7" name="Image 2" descr="/private/tmp/claude-501/-Users-pop7-Library-CloudStorage-OneDrive-MonsterConnectCo--Ltd-Lecture-KOSEN69---software-security/e6d6556f-17de-403d-a9a0-cf2f846149b4/scratchpad/tree/slides/pptx/assets/logo-small.png">    </p:cNvPr>
           <p:cNvPicPr>
             <a:picLocks noChangeAspect="1"/>
           </p:cNvPicPr>
           <p:nvPr/>
         </p:nvPicPr>
         <p:blipFill>
-          <a:blip r:embed="rId2"/>
+          <a:blip r:embed="rId3"/>
           <a:stretch>
             <a:fillRect/>
           </a:stretch>
@@ -8521,7 +8489,7 @@
       </p:sp>
       <p:pic>
         <p:nvPicPr>
-          <p:cNvPr id="10" name="Image 1" descr="/Users/pop7/Library/CloudStorage/OneDrive-MonsterConnectCo.,Ltd/Lecture/KOSEN69 - software-security/slides/pptx/assets/logo-small.png">    </p:cNvPr>
+          <p:cNvPr id="10" name="Image 1" descr="/private/tmp/claude-501/-Users-pop7-Library-CloudStorage-OneDrive-MonsterConnectCo--Ltd-Lecture-KOSEN69---software-security/e6d6556f-17de-403d-a9a0-cf2f846149b4/scratchpad/tree/slides/pptx/assets/logo-small.png">    </p:cNvPr>
           <p:cNvPicPr>
             <a:picLocks noChangeAspect="1"/>
           </p:cNvPicPr>
